--- a/livro_ia_educacao/saida/pptx/Cap02_slides.pptx
+++ b/livro_ia_educacao/saida/pptx/Cap02_slides.pptx
@@ -9403,11 +9403,11 @@
         <p:spPr>
           <a:xfrm>
             <a:off x="548640" y="1417320"/>
-            <a:ext cx="11064240" cy="762000"/>
+            <a:ext cx="11064240" cy="682752"/>
           </a:xfrm>
           <a:prstGeom prst="roundRect">
             <a:avLst>
-              <a:gd name="adj" fmla="val 14400"/>
+              <a:gd name="adj" fmla="val 16071"/>
             </a:avLst>
           </a:prstGeom>
           <a:solidFill>
@@ -9434,7 +9434,7 @@
         <p:spPr>
           <a:xfrm>
             <a:off x="731520" y="1417320"/>
-            <a:ext cx="548640" cy="762000"/>
+            <a:ext cx="548640" cy="682752"/>
           </a:xfrm>
           <a:prstGeom prst="rect">
             <a:avLst/>
@@ -9470,7 +9470,7 @@
         <p:spPr>
           <a:xfrm>
             <a:off x="1463040" y="1417320"/>
-            <a:ext cx="9966960" cy="762000"/>
+            <a:ext cx="9966960" cy="682752"/>
           </a:xfrm>
           <a:prstGeom prst="rect">
             <a:avLst/>
@@ -9505,12 +9505,12 @@
         </p:nvSpPr>
         <p:spPr>
           <a:xfrm>
-            <a:off x="548640" y="2289048"/>
-            <a:ext cx="11064240" cy="762000"/>
+            <a:off x="548640" y="2209800"/>
+            <a:ext cx="11064240" cy="682752"/>
           </a:xfrm>
           <a:prstGeom prst="roundRect">
             <a:avLst>
-              <a:gd name="adj" fmla="val 14400"/>
+              <a:gd name="adj" fmla="val 16071"/>
             </a:avLst>
           </a:prstGeom>
           <a:solidFill>
@@ -9536,8 +9536,8 @@
         </p:nvSpPr>
         <p:spPr>
           <a:xfrm>
-            <a:off x="731520" y="2289048"/>
-            <a:ext cx="548640" cy="762000"/>
+            <a:off x="731520" y="2209800"/>
+            <a:ext cx="548640" cy="682752"/>
           </a:xfrm>
           <a:prstGeom prst="rect">
             <a:avLst/>
@@ -9572,8 +9572,8 @@
         </p:nvSpPr>
         <p:spPr>
           <a:xfrm>
-            <a:off x="1463040" y="2289048"/>
-            <a:ext cx="9966960" cy="762000"/>
+            <a:off x="1463040" y="2209800"/>
+            <a:ext cx="9966960" cy="682752"/>
           </a:xfrm>
           <a:prstGeom prst="rect">
             <a:avLst/>
@@ -9608,12 +9608,12 @@
         </p:nvSpPr>
         <p:spPr>
           <a:xfrm>
-            <a:off x="548640" y="3160776"/>
-            <a:ext cx="11064240" cy="762000"/>
+            <a:off x="548640" y="3002280"/>
+            <a:ext cx="11064240" cy="682752"/>
           </a:xfrm>
           <a:prstGeom prst="roundRect">
             <a:avLst>
-              <a:gd name="adj" fmla="val 14400"/>
+              <a:gd name="adj" fmla="val 16071"/>
             </a:avLst>
           </a:prstGeom>
           <a:solidFill>
@@ -9639,8 +9639,8 @@
         </p:nvSpPr>
         <p:spPr>
           <a:xfrm>
-            <a:off x="731520" y="3160776"/>
-            <a:ext cx="548640" cy="762000"/>
+            <a:off x="731520" y="3002280"/>
+            <a:ext cx="548640" cy="682752"/>
           </a:xfrm>
           <a:prstGeom prst="rect">
             <a:avLst/>
@@ -9675,8 +9675,8 @@
         </p:nvSpPr>
         <p:spPr>
           <a:xfrm>
-            <a:off x="1463040" y="3160776"/>
-            <a:ext cx="9966960" cy="762000"/>
+            <a:off x="1463040" y="3002280"/>
+            <a:ext cx="9966960" cy="682752"/>
           </a:xfrm>
           <a:prstGeom prst="rect">
             <a:avLst/>
@@ -9711,12 +9711,12 @@
         </p:nvSpPr>
         <p:spPr>
           <a:xfrm>
-            <a:off x="548640" y="4032504"/>
-            <a:ext cx="11064240" cy="762000"/>
+            <a:off x="548640" y="3794760"/>
+            <a:ext cx="11064240" cy="682752"/>
           </a:xfrm>
           <a:prstGeom prst="roundRect">
             <a:avLst>
-              <a:gd name="adj" fmla="val 14400"/>
+              <a:gd name="adj" fmla="val 16071"/>
             </a:avLst>
           </a:prstGeom>
           <a:solidFill>
@@ -9742,8 +9742,8 @@
         </p:nvSpPr>
         <p:spPr>
           <a:xfrm>
-            <a:off x="731520" y="4032504"/>
-            <a:ext cx="548640" cy="762000"/>
+            <a:off x="731520" y="3794760"/>
+            <a:ext cx="548640" cy="682752"/>
           </a:xfrm>
           <a:prstGeom prst="rect">
             <a:avLst/>
@@ -9778,8 +9778,8 @@
         </p:nvSpPr>
         <p:spPr>
           <a:xfrm>
-            <a:off x="1463040" y="4032504"/>
-            <a:ext cx="9966960" cy="762000"/>
+            <a:off x="1463040" y="3794760"/>
+            <a:ext cx="9966960" cy="682752"/>
           </a:xfrm>
           <a:prstGeom prst="rect">
             <a:avLst/>
@@ -9814,12 +9814,12 @@
         </p:nvSpPr>
         <p:spPr>
           <a:xfrm>
-            <a:off x="548640" y="4904232"/>
-            <a:ext cx="11064240" cy="762000"/>
+            <a:off x="548640" y="4587240"/>
+            <a:ext cx="11064240" cy="682752"/>
           </a:xfrm>
           <a:prstGeom prst="roundRect">
             <a:avLst>
-              <a:gd name="adj" fmla="val 14400"/>
+              <a:gd name="adj" fmla="val 16071"/>
             </a:avLst>
           </a:prstGeom>
           <a:solidFill>
@@ -9845,8 +9845,8 @@
         </p:nvSpPr>
         <p:spPr>
           <a:xfrm>
-            <a:off x="731520" y="4904232"/>
-            <a:ext cx="548640" cy="762000"/>
+            <a:off x="731520" y="4587240"/>
+            <a:ext cx="548640" cy="682752"/>
           </a:xfrm>
           <a:prstGeom prst="rect">
             <a:avLst/>
@@ -9881,8 +9881,8 @@
         </p:nvSpPr>
         <p:spPr>
           <a:xfrm>
-            <a:off x="1463040" y="4904232"/>
-            <a:ext cx="9966960" cy="762000"/>
+            <a:off x="1463040" y="4587240"/>
+            <a:ext cx="9966960" cy="682752"/>
           </a:xfrm>
           <a:prstGeom prst="rect">
             <a:avLst/>
@@ -9917,12 +9917,12 @@
         </p:nvSpPr>
         <p:spPr>
           <a:xfrm>
-            <a:off x="548640" y="5775960"/>
-            <a:ext cx="11064240" cy="762000"/>
+            <a:off x="548640" y="5379720"/>
+            <a:ext cx="11064240" cy="682752"/>
           </a:xfrm>
           <a:prstGeom prst="roundRect">
             <a:avLst>
-              <a:gd name="adj" fmla="val 14400"/>
+              <a:gd name="adj" fmla="val 16071"/>
             </a:avLst>
           </a:prstGeom>
           <a:solidFill>
@@ -9948,8 +9948,8 @@
         </p:nvSpPr>
         <p:spPr>
           <a:xfrm>
-            <a:off x="731520" y="5775960"/>
-            <a:ext cx="548640" cy="762000"/>
+            <a:off x="731520" y="5379720"/>
+            <a:ext cx="548640" cy="682752"/>
           </a:xfrm>
           <a:prstGeom prst="rect">
             <a:avLst/>
@@ -9984,8 +9984,8 @@
         </p:nvSpPr>
         <p:spPr>
           <a:xfrm>
-            <a:off x="1463040" y="5775960"/>
-            <a:ext cx="9966960" cy="762000"/>
+            <a:off x="1463040" y="5379720"/>
+            <a:ext cx="9966960" cy="682752"/>
           </a:xfrm>
           <a:prstGeom prst="rect">
             <a:avLst/>
